--- a/m5/diapositivos/sessao-03-m5-f07.pptx
+++ b/m5/diapositivos/sessao-03-m5-f07.pptx
@@ -1873,13 +1873,10 @@
               <a:lnSpc>
                 <a:spcPct val="120000"/>
               </a:lnSpc>
-              <a:spcAft>
-                <a:spcPts val="1000"/>
-              </a:spcAft>
-              <a:buNone/>
-            </a:pPr>
-            <a:r>
-              <a:rPr lang="en-US" sz="2000" dirty="0">
+              <a:buNone/>
+            </a:pPr>
+            <a:r>
+              <a:rPr lang="en-US" sz="2000" b="1" dirty="0">
                 <a:solidFill>
                   <a:srgbClr val="F2F0EA"/>
                 </a:solidFill>
@@ -1887,18 +1884,12 @@
                 <a:ea typeface="Georgia" pitchFamily="34" charset="-122"/>
                 <a:cs typeface="Georgia" pitchFamily="34" charset="-120"/>
               </a:rPr>
-              <a:t>Na frase: sujeito, predicado, vocativo, modificador de frase.</a:t>
-            </a:r>
-            <a:endParaRPr lang="en-US" sz="2000" dirty="0"/>
-          </a:p>
-          <a:p>
+              <a:t>Na frase</a:t>
+            </a:r>
             <a:pPr indent="0" marL="0">
               <a:lnSpc>
                 <a:spcPct val="120000"/>
               </a:lnSpc>
-              <a:spcAft>
-                <a:spcPts val="1000"/>
-              </a:spcAft>
               <a:buNone/>
             </a:pPr>
             <a:r>
@@ -1910,22 +1901,16 @@
                 <a:ea typeface="Georgia" pitchFamily="34" charset="-122"/>
                 <a:cs typeface="Georgia" pitchFamily="34" charset="-120"/>
               </a:rPr>
-              <a:t>No grupo verbal: complemento direto (CD), indireto (CI), oblíquo, agente da passiva, predicativo do sujeito, predicativo do complemento direto, modificador do grupo verbal.</a:t>
-            </a:r>
-            <a:endParaRPr lang="en-US" sz="2000" dirty="0"/>
-          </a:p>
-          <a:p>
+              <a:t>: sujeito, predicado, vocativo, modificador de frase. </a:t>
+            </a:r>
             <a:pPr indent="0" marL="0">
               <a:lnSpc>
                 <a:spcPct val="120000"/>
               </a:lnSpc>
-              <a:spcAft>
-                <a:spcPts val="1000"/>
-              </a:spcAft>
-              <a:buNone/>
-            </a:pPr>
-            <a:r>
-              <a:rPr lang="en-US" sz="2000" dirty="0">
+              <a:buNone/>
+            </a:pPr>
+            <a:r>
+              <a:rPr lang="en-US" sz="2000" b="1" dirty="0">
                 <a:solidFill>
                   <a:srgbClr val="F2F0EA"/>
                 </a:solidFill>
@@ -1933,18 +1918,12 @@
                 <a:ea typeface="Georgia" pitchFamily="34" charset="-122"/>
                 <a:cs typeface="Georgia" pitchFamily="34" charset="-120"/>
               </a:rPr>
-              <a:t>No grupo nominal: complemento do nome, modificador restritivo e apositivo do nome. Quatro testes.</a:t>
-            </a:r>
-            <a:endParaRPr lang="en-US" sz="2000" dirty="0"/>
-          </a:p>
-          <a:p>
+              <a:t>No grupo verbal</a:t>
+            </a:r>
             <a:pPr indent="0" marL="0">
               <a:lnSpc>
                 <a:spcPct val="120000"/>
               </a:lnSpc>
-              <a:spcAft>
-                <a:spcPts val="1000"/>
-              </a:spcAft>
               <a:buNone/>
             </a:pPr>
             <a:r>
@@ -1956,22 +1935,16 @@
                 <a:ea typeface="Georgia" pitchFamily="34" charset="-122"/>
                 <a:cs typeface="Georgia" pitchFamily="34" charset="-120"/>
               </a:rPr>
-              <a:t>Trocar por pronome: «o», «a» dão o complemento direto; «lhe» dá o indireto.</a:t>
-            </a:r>
-            <a:endParaRPr lang="en-US" sz="2000" dirty="0"/>
-          </a:p>
-          <a:p>
+              <a:t>: complemento direto (CD), indireto (CI), oblíquo, agente da passiva, predicativo do sujeito, predicativo do complemento direto, modificador do grupo verbal. </a:t>
+            </a:r>
             <a:pPr indent="0" marL="0">
               <a:lnSpc>
                 <a:spcPct val="120000"/>
               </a:lnSpc>
-              <a:spcAft>
-                <a:spcPts val="1000"/>
-              </a:spcAft>
-              <a:buNone/>
-            </a:pPr>
-            <a:r>
-              <a:rPr lang="en-US" sz="2000" dirty="0">
+              <a:buNone/>
+            </a:pPr>
+            <a:r>
+              <a:rPr lang="en-US" sz="2000" b="1" dirty="0">
                 <a:solidFill>
                   <a:srgbClr val="F2F0EA"/>
                 </a:solidFill>
@@ -1979,18 +1952,12 @@
                 <a:ea typeface="Georgia" pitchFamily="34" charset="-122"/>
                 <a:cs typeface="Georgia" pitchFamily="34" charset="-120"/>
               </a:rPr>
-              <a:t>Cortar: se a frase se aguenta, a expressão é um modificador.</a:t>
-            </a:r>
-            <a:endParaRPr lang="en-US" sz="2000" dirty="0"/>
-          </a:p>
-          <a:p>
+              <a:t>No grupo nominal</a:t>
+            </a:r>
             <a:pPr indent="0" marL="0">
               <a:lnSpc>
                 <a:spcPct val="120000"/>
               </a:lnSpc>
-              <a:spcAft>
-                <a:spcPts val="1000"/>
-              </a:spcAft>
               <a:buNone/>
             </a:pPr>
             <a:r>
@@ -2002,22 +1969,16 @@
                 <a:ea typeface="Georgia" pitchFamily="34" charset="-122"/>
                 <a:cs typeface="Georgia" pitchFamily="34" charset="-120"/>
               </a:rPr>
-              <a:t>Perguntar «quem?» antes do verbo: a resposta é o sujeito.</a:t>
-            </a:r>
-            <a:endParaRPr lang="en-US" sz="2000" dirty="0"/>
-          </a:p>
-          <a:p>
+              <a:t>: complemento do nome, modificador restritivo e apositivo do nome. </a:t>
+            </a:r>
             <a:pPr indent="0" marL="0">
               <a:lnSpc>
                 <a:spcPct val="120000"/>
               </a:lnSpc>
-              <a:spcAft>
-                <a:spcPts val="1000"/>
-              </a:spcAft>
-              <a:buNone/>
-            </a:pPr>
-            <a:r>
-              <a:rPr lang="en-US" sz="2000" dirty="0">
+              <a:buNone/>
+            </a:pPr>
+            <a:r>
+              <a:rPr lang="en-US" sz="2000" b="1" dirty="0">
                 <a:solidFill>
                   <a:srgbClr val="F2F0EA"/>
                 </a:solidFill>
@@ -2025,7 +1986,160 @@
                 <a:ea typeface="Georgia" pitchFamily="34" charset="-122"/>
                 <a:cs typeface="Georgia" pitchFamily="34" charset="-120"/>
               </a:rPr>
-              <a:t>Passar à passiva: o que vem depois de «por» é o agente.</a:t>
+              <a:t>Quatro testes.</a:t>
+            </a:r>
+            <a:pPr indent="0" marL="0">
+              <a:lnSpc>
+                <a:spcPct val="120000"/>
+              </a:lnSpc>
+              <a:buNone/>
+            </a:pPr>
+            <a:r>
+              <a:rPr lang="en-US" sz="2000" dirty="0">
+                <a:solidFill>
+                  <a:srgbClr val="F2F0EA"/>
+                </a:solidFill>
+                <a:latin typeface="Georgia" pitchFamily="34" charset="0"/>
+                <a:ea typeface="Georgia" pitchFamily="34" charset="-122"/>
+                <a:cs typeface="Georgia" pitchFamily="34" charset="-120"/>
+              </a:rPr>
+              <a:t> </a:t>
+            </a:r>
+            <a:pPr indent="0" marL="0">
+              <a:lnSpc>
+                <a:spcPct val="120000"/>
+              </a:lnSpc>
+              <a:buNone/>
+            </a:pPr>
+            <a:r>
+              <a:rPr lang="en-US" sz="2000" b="1" dirty="0">
+                <a:solidFill>
+                  <a:srgbClr val="F2F0EA"/>
+                </a:solidFill>
+                <a:latin typeface="Georgia" pitchFamily="34" charset="0"/>
+                <a:ea typeface="Georgia" pitchFamily="34" charset="-122"/>
+                <a:cs typeface="Georgia" pitchFamily="34" charset="-120"/>
+              </a:rPr>
+              <a:t>Trocar por pronome</a:t>
+            </a:r>
+            <a:pPr indent="0" marL="0">
+              <a:lnSpc>
+                <a:spcPct val="120000"/>
+              </a:lnSpc>
+              <a:buNone/>
+            </a:pPr>
+            <a:r>
+              <a:rPr lang="en-US" sz="2000" dirty="0">
+                <a:solidFill>
+                  <a:srgbClr val="F2F0EA"/>
+                </a:solidFill>
+                <a:latin typeface="Georgia" pitchFamily="34" charset="0"/>
+                <a:ea typeface="Georgia" pitchFamily="34" charset="-122"/>
+                <a:cs typeface="Georgia" pitchFamily="34" charset="-120"/>
+              </a:rPr>
+              <a:t>: «o», «a» dão o complemento direto; «lhe» dá o indireto. </a:t>
+            </a:r>
+            <a:pPr indent="0" marL="0">
+              <a:lnSpc>
+                <a:spcPct val="120000"/>
+              </a:lnSpc>
+              <a:buNone/>
+            </a:pPr>
+            <a:r>
+              <a:rPr lang="en-US" sz="2000" b="1" dirty="0">
+                <a:solidFill>
+                  <a:srgbClr val="F2F0EA"/>
+                </a:solidFill>
+                <a:latin typeface="Georgia" pitchFamily="34" charset="0"/>
+                <a:ea typeface="Georgia" pitchFamily="34" charset="-122"/>
+                <a:cs typeface="Georgia" pitchFamily="34" charset="-120"/>
+              </a:rPr>
+              <a:t>Cortar</a:t>
+            </a:r>
+            <a:pPr indent="0" marL="0">
+              <a:lnSpc>
+                <a:spcPct val="120000"/>
+              </a:lnSpc>
+              <a:buNone/>
+            </a:pPr>
+            <a:r>
+              <a:rPr lang="en-US" sz="2000" dirty="0">
+                <a:solidFill>
+                  <a:srgbClr val="F2F0EA"/>
+                </a:solidFill>
+                <a:latin typeface="Georgia" pitchFamily="34" charset="0"/>
+                <a:ea typeface="Georgia" pitchFamily="34" charset="-122"/>
+                <a:cs typeface="Georgia" pitchFamily="34" charset="-120"/>
+              </a:rPr>
+              <a:t>: se a frase se aguenta, a expressão é um modificador. </a:t>
+            </a:r>
+            <a:pPr indent="0" marL="0">
+              <a:lnSpc>
+                <a:spcPct val="120000"/>
+              </a:lnSpc>
+              <a:buNone/>
+            </a:pPr>
+            <a:r>
+              <a:rPr lang="en-US" sz="2000" b="1" dirty="0">
+                <a:solidFill>
+                  <a:srgbClr val="F2F0EA"/>
+                </a:solidFill>
+                <a:latin typeface="Georgia" pitchFamily="34" charset="0"/>
+                <a:ea typeface="Georgia" pitchFamily="34" charset="-122"/>
+                <a:cs typeface="Georgia" pitchFamily="34" charset="-120"/>
+              </a:rPr>
+              <a:t>Perguntar «quem?»</a:t>
+            </a:r>
+            <a:pPr indent="0" marL="0">
+              <a:lnSpc>
+                <a:spcPct val="120000"/>
+              </a:lnSpc>
+              <a:buNone/>
+            </a:pPr>
+            <a:r>
+              <a:rPr lang="en-US" sz="2000" dirty="0">
+                <a:solidFill>
+                  <a:srgbClr val="F2F0EA"/>
+                </a:solidFill>
+                <a:latin typeface="Georgia" pitchFamily="34" charset="0"/>
+                <a:ea typeface="Georgia" pitchFamily="34" charset="-122"/>
+                <a:cs typeface="Georgia" pitchFamily="34" charset="-120"/>
+              </a:rPr>
+              <a:t> antes do verbo: a resposta é o sujeito. </a:t>
+            </a:r>
+            <a:pPr indent="0" marL="0">
+              <a:lnSpc>
+                <a:spcPct val="120000"/>
+              </a:lnSpc>
+              <a:buNone/>
+            </a:pPr>
+            <a:r>
+              <a:rPr lang="en-US" sz="2000" b="1" dirty="0">
+                <a:solidFill>
+                  <a:srgbClr val="F2F0EA"/>
+                </a:solidFill>
+                <a:latin typeface="Georgia" pitchFamily="34" charset="0"/>
+                <a:ea typeface="Georgia" pitchFamily="34" charset="-122"/>
+                <a:cs typeface="Georgia" pitchFamily="34" charset="-120"/>
+              </a:rPr>
+              <a:t>Passar à passiva</a:t>
+            </a:r>
+            <a:pPr indent="0" marL="0">
+              <a:lnSpc>
+                <a:spcPct val="120000"/>
+              </a:lnSpc>
+              <a:buNone/>
+            </a:pPr>
+            <a:r>
+              <a:rPr lang="en-US" sz="2000" dirty="0">
+                <a:solidFill>
+                  <a:srgbClr val="F2F0EA"/>
+                </a:solidFill>
+                <a:latin typeface="Georgia" pitchFamily="34" charset="0"/>
+                <a:ea typeface="Georgia" pitchFamily="34" charset="-122"/>
+                <a:cs typeface="Georgia" pitchFamily="34" charset="-120"/>
+              </a:rPr>
+              <a:t>: o que vem depois de «por» é o agente.</a:t>
             </a:r>
             <a:endParaRPr lang="en-US" sz="2000" dirty="0"/>
           </a:p>
@@ -2432,7 +2546,41 @@
                 <a:ea typeface="Arial" pitchFamily="34" charset="-122"/>
                 <a:cs typeface="Arial" pitchFamily="34" charset="-120"/>
               </a:rPr>
-              <a:t>Esta lição de gramática trabalha as funções sintáticas em frases de Amor de Perdição, ou feitas a partir dele, com a grafia atualizada.</a:t>
+              <a:t>Esta lição de gramática trabalha as funções sintáticas em frases de </a:t>
+            </a:r>
+            <a:pPr indent="0" marL="0">
+              <a:lnSpc>
+                <a:spcPct val="105000"/>
+              </a:lnSpc>
+              <a:buNone/>
+            </a:pPr>
+            <a:r>
+              <a:rPr lang="en-US" sz="2200" i="1" dirty="0">
+                <a:solidFill>
+                  <a:srgbClr val="F2F0EA"/>
+                </a:solidFill>
+                <a:latin typeface="Arial" pitchFamily="34" charset="0"/>
+                <a:ea typeface="Arial" pitchFamily="34" charset="-122"/>
+                <a:cs typeface="Arial" pitchFamily="34" charset="-120"/>
+              </a:rPr>
+              <a:t>Amor de Perdição</a:t>
+            </a:r>
+            <a:pPr indent="0" marL="0">
+              <a:lnSpc>
+                <a:spcPct val="105000"/>
+              </a:lnSpc>
+              <a:buNone/>
+            </a:pPr>
+            <a:r>
+              <a:rPr lang="en-US" sz="2200" dirty="0">
+                <a:solidFill>
+                  <a:srgbClr val="F2F0EA"/>
+                </a:solidFill>
+                <a:latin typeface="Arial" pitchFamily="34" charset="0"/>
+                <a:ea typeface="Arial" pitchFamily="34" charset="-122"/>
+                <a:cs typeface="Arial" pitchFamily="34" charset="-120"/>
+              </a:rPr>
+              <a:t>, ou feitas a partir dele, com a grafia atualizada.</a:t>
             </a:r>
             <a:endParaRPr lang="en-US" sz="2200" dirty="0"/>
           </a:p>
@@ -5755,7 +5903,41 @@
                 <a:ea typeface="Arial" pitchFamily="34" charset="-122"/>
                 <a:cs typeface="Arial" pitchFamily="34" charset="-120"/>
               </a:rPr>
-              <a:t>Na passiva, «O dinheiro foi aceite por Simão», o antigo sujeito passa a complemento agente da passiva; em «Teresa enviou-lha», lha junta o indireto e o direto.</a:t>
+              <a:t>Na passiva, «O dinheiro foi aceite por Simão», o antigo sujeito passa a complemento agente da passiva; em «Teresa enviou-lha», </a:t>
+            </a:r>
+            <a:pPr indent="0" marL="0">
+              <a:lnSpc>
+                <a:spcPct val="105000"/>
+              </a:lnSpc>
+              <a:buNone/>
+            </a:pPr>
+            <a:r>
+              <a:rPr lang="en-US" sz="2200" i="1" dirty="0">
+                <a:solidFill>
+                  <a:srgbClr val="F2F0EA"/>
+                </a:solidFill>
+                <a:latin typeface="Arial" pitchFamily="34" charset="0"/>
+                <a:ea typeface="Arial" pitchFamily="34" charset="-122"/>
+                <a:cs typeface="Arial" pitchFamily="34" charset="-120"/>
+              </a:rPr>
+              <a:t>lha</a:t>
+            </a:r>
+            <a:pPr indent="0" marL="0">
+              <a:lnSpc>
+                <a:spcPct val="105000"/>
+              </a:lnSpc>
+              <a:buNone/>
+            </a:pPr>
+            <a:r>
+              <a:rPr lang="en-US" sz="2200" dirty="0">
+                <a:solidFill>
+                  <a:srgbClr val="F2F0EA"/>
+                </a:solidFill>
+                <a:latin typeface="Arial" pitchFamily="34" charset="0"/>
+                <a:ea typeface="Arial" pitchFamily="34" charset="-122"/>
+                <a:cs typeface="Arial" pitchFamily="34" charset="-120"/>
+              </a:rPr>
+              <a:t> junta o indireto e o direto.</a:t>
             </a:r>
             <a:endParaRPr lang="en-US" sz="2200" dirty="0"/>
           </a:p>
